--- a/Karl_Major Revision/Waveforms_fig_v2.pptx
+++ b/Karl_Major Revision/Waveforms_fig_v2.pptx
@@ -249,7 +249,7 @@
           <a:p>
             <a:fld id="{EE7F2677-E5D1-48BB-B124-3CAA138518D8}" type="datetimeFigureOut">
               <a:rPr lang="en-US" smtClean="0"/>
-              <a:t>8/3/2026</a:t>
+              <a:t>8/10/2026</a:t>
             </a:fld>
             <a:endParaRPr lang="en-US"/>
           </a:p>
@@ -419,7 +419,7 @@
           <a:p>
             <a:fld id="{EE7F2677-E5D1-48BB-B124-3CAA138518D8}" type="datetimeFigureOut">
               <a:rPr lang="en-US" smtClean="0"/>
-              <a:t>8/3/2026</a:t>
+              <a:t>8/10/2026</a:t>
             </a:fld>
             <a:endParaRPr lang="en-US"/>
           </a:p>
@@ -599,7 +599,7 @@
           <a:p>
             <a:fld id="{EE7F2677-E5D1-48BB-B124-3CAA138518D8}" type="datetimeFigureOut">
               <a:rPr lang="en-US" smtClean="0"/>
-              <a:t>8/3/2026</a:t>
+              <a:t>8/10/2026</a:t>
             </a:fld>
             <a:endParaRPr lang="en-US"/>
           </a:p>
@@ -769,7 +769,7 @@
           <a:p>
             <a:fld id="{EE7F2677-E5D1-48BB-B124-3CAA138518D8}" type="datetimeFigureOut">
               <a:rPr lang="en-US" smtClean="0"/>
-              <a:t>8/3/2026</a:t>
+              <a:t>8/10/2026</a:t>
             </a:fld>
             <a:endParaRPr lang="en-US"/>
           </a:p>
@@ -1015,7 +1015,7 @@
           <a:p>
             <a:fld id="{EE7F2677-E5D1-48BB-B124-3CAA138518D8}" type="datetimeFigureOut">
               <a:rPr lang="en-US" smtClean="0"/>
-              <a:t>8/3/2026</a:t>
+              <a:t>8/10/2026</a:t>
             </a:fld>
             <a:endParaRPr lang="en-US"/>
           </a:p>
@@ -1247,7 +1247,7 @@
           <a:p>
             <a:fld id="{EE7F2677-E5D1-48BB-B124-3CAA138518D8}" type="datetimeFigureOut">
               <a:rPr lang="en-US" smtClean="0"/>
-              <a:t>8/3/2026</a:t>
+              <a:t>8/10/2026</a:t>
             </a:fld>
             <a:endParaRPr lang="en-US"/>
           </a:p>
@@ -1614,7 +1614,7 @@
           <a:p>
             <a:fld id="{EE7F2677-E5D1-48BB-B124-3CAA138518D8}" type="datetimeFigureOut">
               <a:rPr lang="en-US" smtClean="0"/>
-              <a:t>8/3/2026</a:t>
+              <a:t>8/10/2026</a:t>
             </a:fld>
             <a:endParaRPr lang="en-US"/>
           </a:p>
@@ -1732,7 +1732,7 @@
           <a:p>
             <a:fld id="{EE7F2677-E5D1-48BB-B124-3CAA138518D8}" type="datetimeFigureOut">
               <a:rPr lang="en-US" smtClean="0"/>
-              <a:t>8/3/2026</a:t>
+              <a:t>8/10/2026</a:t>
             </a:fld>
             <a:endParaRPr lang="en-US"/>
           </a:p>
@@ -1827,7 +1827,7 @@
           <a:p>
             <a:fld id="{EE7F2677-E5D1-48BB-B124-3CAA138518D8}" type="datetimeFigureOut">
               <a:rPr lang="en-US" smtClean="0"/>
-              <a:t>8/3/2026</a:t>
+              <a:t>8/10/2026</a:t>
             </a:fld>
             <a:endParaRPr lang="en-US"/>
           </a:p>
@@ -2104,7 +2104,7 @@
           <a:p>
             <a:fld id="{EE7F2677-E5D1-48BB-B124-3CAA138518D8}" type="datetimeFigureOut">
               <a:rPr lang="en-US" smtClean="0"/>
-              <a:t>8/3/2026</a:t>
+              <a:t>8/10/2026</a:t>
             </a:fld>
             <a:endParaRPr lang="en-US"/>
           </a:p>
@@ -2361,7 +2361,7 @@
           <a:p>
             <a:fld id="{EE7F2677-E5D1-48BB-B124-3CAA138518D8}" type="datetimeFigureOut">
               <a:rPr lang="en-US" smtClean="0"/>
-              <a:t>8/3/2026</a:t>
+              <a:t>8/10/2026</a:t>
             </a:fld>
             <a:endParaRPr lang="en-US"/>
           </a:p>
@@ -2574,7 +2574,7 @@
           <a:p>
             <a:fld id="{EE7F2677-E5D1-48BB-B124-3CAA138518D8}" type="datetimeFigureOut">
               <a:rPr lang="en-US" smtClean="0"/>
-              <a:t>8/3/2026</a:t>
+              <a:t>8/10/2026</a:t>
             </a:fld>
             <a:endParaRPr lang="en-US"/>
           </a:p>
@@ -4183,8 +4183,8 @@
           </a:fontRef>
         </p:style>
       </p:cxnSp>
-      <mc:AlternateContent xmlns:mc="http://schemas.openxmlformats.org/markup-compatibility/2006">
-        <mc:Choice xmlns:a14="http://schemas.microsoft.com/office/drawing/2010/main" Requires="a14">
+      <mc:AlternateContent xmlns:mc="http://schemas.openxmlformats.org/markup-compatibility/2006" xmlns:a14="http://schemas.microsoft.com/office/drawing/2010/main">
+        <mc:Choice Requires="a14">
           <p:sp>
             <p:nvSpPr>
               <p:cNvPr id="7" name="TextBox 6">
@@ -4251,7 +4251,7 @@
             </p:txBody>
           </p:sp>
         </mc:Choice>
-        <mc:Fallback>
+        <mc:Fallback xmlns="">
           <p:sp>
             <p:nvSpPr>
               <p:cNvPr id="7" name="TextBox 6">
@@ -7402,8 +7402,8 @@
             </p:nvSpPr>
             <p:spPr>
               <a:xfrm>
-                <a:off x="442190" y="1487846"/>
-                <a:ext cx="2079498" cy="461665"/>
+                <a:off x="578535" y="1605123"/>
+                <a:ext cx="1572470" cy="461665"/>
               </a:xfrm>
               <a:prstGeom prst="rect">
                 <a:avLst/>
@@ -7471,8 +7471,8 @@
             </p:nvSpPr>
             <p:spPr>
               <a:xfrm>
-                <a:off x="442190" y="1487846"/>
-                <a:ext cx="2079498" cy="461665"/>
+                <a:off x="578535" y="1605123"/>
+                <a:ext cx="1572470" cy="461665"/>
               </a:xfrm>
               <a:prstGeom prst="rect">
                 <a:avLst/>
@@ -8947,164 +8947,6 @@
           </a:p>
         </p:txBody>
       </p:sp>
-      <p:cxnSp>
-        <p:nvCxnSpPr>
-          <p:cNvPr id="6" name="Straight Arrow Connector 5">
-            <a:extLst>
-              <a:ext uri="{FF2B5EF4-FFF2-40B4-BE49-F238E27FC236}">
-                <a16:creationId xmlns:a16="http://schemas.microsoft.com/office/drawing/2014/main" id="{38481993-3ED0-8DCD-C306-4CDF803E49AA}"/>
-              </a:ext>
-            </a:extLst>
-          </p:cNvPr>
-          <p:cNvCxnSpPr>
-            <a:cxnSpLocks/>
-          </p:cNvCxnSpPr>
-          <p:nvPr/>
-        </p:nvCxnSpPr>
-        <p:spPr>
-          <a:xfrm>
-            <a:off x="2567292" y="1981391"/>
-            <a:ext cx="1226917" cy="0"/>
-          </a:xfrm>
-          <a:prstGeom prst="straightConnector1">
-            <a:avLst/>
-          </a:prstGeom>
-          <a:ln w="38100">
-            <a:solidFill>
-              <a:schemeClr val="tx1"/>
-            </a:solidFill>
-            <a:headEnd type="triangle"/>
-            <a:tailEnd type="triangle"/>
-          </a:ln>
-        </p:spPr>
-        <p:style>
-          <a:lnRef idx="1">
-            <a:schemeClr val="accent1"/>
-          </a:lnRef>
-          <a:fillRef idx="0">
-            <a:schemeClr val="accent1"/>
-          </a:fillRef>
-          <a:effectRef idx="0">
-            <a:schemeClr val="accent1"/>
-          </a:effectRef>
-          <a:fontRef idx="minor">
-            <a:schemeClr val="tx1"/>
-          </a:fontRef>
-        </p:style>
-      </p:cxnSp>
-      <mc:AlternateContent xmlns:mc="http://schemas.openxmlformats.org/markup-compatibility/2006" xmlns:a14="http://schemas.microsoft.com/office/drawing/2010/main">
-        <mc:Choice Requires="a14">
-          <p:sp>
-            <p:nvSpPr>
-              <p:cNvPr id="7" name="TextBox 6">
-                <a:extLst>
-                  <a:ext uri="{FF2B5EF4-FFF2-40B4-BE49-F238E27FC236}">
-                    <a16:creationId xmlns:a16="http://schemas.microsoft.com/office/drawing/2014/main" id="{82CA20E8-0A21-646C-405A-245DA0401039}"/>
-                  </a:ext>
-                </a:extLst>
-              </p:cNvPr>
-              <p:cNvSpPr txBox="1"/>
-              <p:nvPr/>
-            </p:nvSpPr>
-            <p:spPr>
-              <a:xfrm>
-                <a:off x="2326390" y="1432135"/>
-                <a:ext cx="2079498" cy="461665"/>
-              </a:xfrm>
-              <a:prstGeom prst="rect">
-                <a:avLst/>
-              </a:prstGeom>
-              <a:noFill/>
-            </p:spPr>
-            <p:txBody>
-              <a:bodyPr wrap="square" rtlCol="0">
-                <a:spAutoFit/>
-              </a:bodyPr>
-              <a:lstStyle/>
-              <a:p>
-                <a:pPr algn="ctr"/>
-                <a:r>
-                  <a:rPr lang="en-PH" sz="2400" b="1" dirty="0">
-                    <a:latin typeface="Times New Roman" panose="02020603050405020304" pitchFamily="18" charset="0"/>
-                    <a:ea typeface="Malgun Gothic" panose="020B0503020000020004" pitchFamily="34" charset="-127"/>
-                    <a:cs typeface="Times New Roman" panose="02020603050405020304" pitchFamily="18" charset="0"/>
-                  </a:rPr>
-                  <a:t>2 </a:t>
-                </a:r>
-                <a14:m>
-                  <m:oMath xmlns:m="http://schemas.openxmlformats.org/officeDocument/2006/math">
-                    <m:r>
-                      <a:rPr lang="en-US" sz="2400" b="1" i="1">
-                        <a:latin typeface="Cambria Math" panose="02040503050406030204" pitchFamily="18" charset="0"/>
-                        <a:ea typeface="Malgun Gothic" panose="020B0503020000020004" pitchFamily="34" charset="-127"/>
-                        <a:cs typeface="Times New Roman" panose="02020603050405020304" pitchFamily="18" charset="0"/>
-                      </a:rPr>
-                      <m:t>𝝁</m:t>
-                    </m:r>
-                  </m:oMath>
-                </a14:m>
-                <a:r>
-                  <a:rPr lang="en-PH" sz="2400" b="1" dirty="0">
-                    <a:latin typeface="Times New Roman" panose="02020603050405020304" pitchFamily="18" charset="0"/>
-                    <a:ea typeface="Malgun Gothic" panose="020B0503020000020004" pitchFamily="34" charset="-127"/>
-                    <a:cs typeface="Times New Roman" panose="02020603050405020304" pitchFamily="18" charset="0"/>
-                  </a:rPr>
-                  <a:t>s/div.</a:t>
-                </a:r>
-                <a:endParaRPr lang="en-PH" sz="2400" b="1" baseline="-25000" dirty="0">
-                  <a:latin typeface="Times New Roman" panose="02020603050405020304" pitchFamily="18" charset="0"/>
-                  <a:ea typeface="Malgun Gothic" panose="020B0503020000020004" pitchFamily="34" charset="-127"/>
-                  <a:cs typeface="Times New Roman" panose="02020603050405020304" pitchFamily="18" charset="0"/>
-                </a:endParaRPr>
-              </a:p>
-            </p:txBody>
-          </p:sp>
-        </mc:Choice>
-        <mc:Fallback xmlns="">
-          <p:sp>
-            <p:nvSpPr>
-              <p:cNvPr id="7" name="TextBox 6">
-                <a:extLst>
-                  <a:ext uri="{FF2B5EF4-FFF2-40B4-BE49-F238E27FC236}">
-                    <a16:creationId xmlns:a16="http://schemas.microsoft.com/office/drawing/2014/main" id="{82CA20E8-0A21-646C-405A-245DA0401039}"/>
-                  </a:ext>
-                </a:extLst>
-              </p:cNvPr>
-              <p:cNvSpPr txBox="1">
-                <a:spLocks noRot="1" noChangeAspect="1" noMove="1" noResize="1" noEditPoints="1" noAdjustHandles="1" noChangeArrowheads="1" noChangeShapeType="1" noTextEdit="1"/>
-              </p:cNvSpPr>
-              <p:nvPr/>
-            </p:nvSpPr>
-            <p:spPr>
-              <a:xfrm>
-                <a:off x="2326390" y="1432135"/>
-                <a:ext cx="2079498" cy="461665"/>
-              </a:xfrm>
-              <a:prstGeom prst="rect">
-                <a:avLst/>
-              </a:prstGeom>
-              <a:blipFill>
-                <a:blip r:embed="rId3"/>
-                <a:stretch>
-                  <a:fillRect t="-10526" b="-28947"/>
-                </a:stretch>
-              </a:blipFill>
-            </p:spPr>
-            <p:txBody>
-              <a:bodyPr/>
-              <a:lstStyle/>
-              <a:p>
-                <a:r>
-                  <a:rPr lang="en-US">
-                    <a:noFill/>
-                  </a:rPr>
-                  <a:t> </a:t>
-                </a:r>
-              </a:p>
-            </p:txBody>
-          </p:sp>
-        </mc:Fallback>
-      </mc:AlternateContent>
       <p:cxnSp>
         <p:nvCxnSpPr>
           <p:cNvPr id="8" name="Straight Arrow Connector 7">
@@ -11810,6 +11652,164 @@
           </a:p>
         </p:txBody>
       </p:sp>
+      <p:cxnSp>
+        <p:nvCxnSpPr>
+          <p:cNvPr id="56" name="Straight Arrow Connector 55">
+            <a:extLst>
+              <a:ext uri="{FF2B5EF4-FFF2-40B4-BE49-F238E27FC236}">
+                <a16:creationId xmlns:a16="http://schemas.microsoft.com/office/drawing/2014/main" id="{85415237-8333-85BB-D4F3-DF62A4A03BCE}"/>
+              </a:ext>
+            </a:extLst>
+          </p:cNvPr>
+          <p:cNvCxnSpPr>
+            <a:cxnSpLocks/>
+          </p:cNvCxnSpPr>
+          <p:nvPr/>
+        </p:nvCxnSpPr>
+        <p:spPr>
+          <a:xfrm>
+            <a:off x="1312282" y="2071946"/>
+            <a:ext cx="1267528" cy="0"/>
+          </a:xfrm>
+          <a:prstGeom prst="straightConnector1">
+            <a:avLst/>
+          </a:prstGeom>
+          <a:ln w="38100">
+            <a:solidFill>
+              <a:schemeClr val="tx1"/>
+            </a:solidFill>
+            <a:headEnd type="triangle"/>
+            <a:tailEnd type="triangle"/>
+          </a:ln>
+        </p:spPr>
+        <p:style>
+          <a:lnRef idx="1">
+            <a:schemeClr val="accent1"/>
+          </a:lnRef>
+          <a:fillRef idx="0">
+            <a:schemeClr val="accent1"/>
+          </a:fillRef>
+          <a:effectRef idx="0">
+            <a:schemeClr val="accent1"/>
+          </a:effectRef>
+          <a:fontRef idx="minor">
+            <a:schemeClr val="tx1"/>
+          </a:fontRef>
+        </p:style>
+      </p:cxnSp>
+      <mc:AlternateContent xmlns:mc="http://schemas.openxmlformats.org/markup-compatibility/2006">
+        <mc:Choice xmlns:a14="http://schemas.microsoft.com/office/drawing/2010/main" Requires="a14">
+          <p:sp>
+            <p:nvSpPr>
+              <p:cNvPr id="57" name="TextBox 56">
+                <a:extLst>
+                  <a:ext uri="{FF2B5EF4-FFF2-40B4-BE49-F238E27FC236}">
+                    <a16:creationId xmlns:a16="http://schemas.microsoft.com/office/drawing/2014/main" id="{3D9DBFAC-CA75-C85B-0531-E29A74AB9958}"/>
+                  </a:ext>
+                </a:extLst>
+              </p:cNvPr>
+              <p:cNvSpPr txBox="1"/>
+              <p:nvPr/>
+            </p:nvSpPr>
+            <p:spPr>
+              <a:xfrm>
+                <a:off x="1143685" y="1605123"/>
+                <a:ext cx="1572470" cy="461665"/>
+              </a:xfrm>
+              <a:prstGeom prst="rect">
+                <a:avLst/>
+              </a:prstGeom>
+              <a:noFill/>
+            </p:spPr>
+            <p:txBody>
+              <a:bodyPr wrap="square" rtlCol="0">
+                <a:spAutoFit/>
+              </a:bodyPr>
+              <a:lstStyle/>
+              <a:p>
+                <a:pPr algn="ctr"/>
+                <a:r>
+                  <a:rPr lang="en-PH" sz="2400" b="1" dirty="0">
+                    <a:latin typeface="Times New Roman" panose="02020603050405020304" pitchFamily="18" charset="0"/>
+                    <a:ea typeface="Malgun Gothic" panose="020B0503020000020004" pitchFamily="34" charset="-127"/>
+                    <a:cs typeface="Times New Roman" panose="02020603050405020304" pitchFamily="18" charset="0"/>
+                  </a:rPr>
+                  <a:t>2 </a:t>
+                </a:r>
+                <a14:m>
+                  <m:oMath xmlns:m="http://schemas.openxmlformats.org/officeDocument/2006/math">
+                    <m:r>
+                      <a:rPr lang="en-US" sz="2400" b="1" i="1" smtClean="0">
+                        <a:latin typeface="Cambria Math" panose="02040503050406030204" pitchFamily="18" charset="0"/>
+                        <a:ea typeface="Malgun Gothic" panose="020B0503020000020004" pitchFamily="34" charset="-127"/>
+                        <a:cs typeface="Times New Roman" panose="02020603050405020304" pitchFamily="18" charset="0"/>
+                      </a:rPr>
+                      <m:t>𝝁</m:t>
+                    </m:r>
+                  </m:oMath>
+                </a14:m>
+                <a:r>
+                  <a:rPr lang="en-PH" sz="2400" b="1" dirty="0">
+                    <a:latin typeface="Times New Roman" panose="02020603050405020304" pitchFamily="18" charset="0"/>
+                    <a:ea typeface="Malgun Gothic" panose="020B0503020000020004" pitchFamily="34" charset="-127"/>
+                    <a:cs typeface="Times New Roman" panose="02020603050405020304" pitchFamily="18" charset="0"/>
+                  </a:rPr>
+                  <a:t>s/div.</a:t>
+                </a:r>
+                <a:endParaRPr lang="en-PH" sz="2400" b="1" baseline="-25000" dirty="0">
+                  <a:latin typeface="Times New Roman" panose="02020603050405020304" pitchFamily="18" charset="0"/>
+                  <a:ea typeface="Malgun Gothic" panose="020B0503020000020004" pitchFamily="34" charset="-127"/>
+                  <a:cs typeface="Times New Roman" panose="02020603050405020304" pitchFamily="18" charset="0"/>
+                </a:endParaRPr>
+              </a:p>
+            </p:txBody>
+          </p:sp>
+        </mc:Choice>
+        <mc:Fallback>
+          <p:sp>
+            <p:nvSpPr>
+              <p:cNvPr id="57" name="TextBox 56">
+                <a:extLst>
+                  <a:ext uri="{FF2B5EF4-FFF2-40B4-BE49-F238E27FC236}">
+                    <a16:creationId xmlns:a16="http://schemas.microsoft.com/office/drawing/2014/main" id="{3D9DBFAC-CA75-C85B-0531-E29A74AB9958}"/>
+                  </a:ext>
+                </a:extLst>
+              </p:cNvPr>
+              <p:cNvSpPr txBox="1">
+                <a:spLocks noRot="1" noChangeAspect="1" noMove="1" noResize="1" noEditPoints="1" noAdjustHandles="1" noChangeArrowheads="1" noChangeShapeType="1" noTextEdit="1"/>
+              </p:cNvSpPr>
+              <p:nvPr/>
+            </p:nvSpPr>
+            <p:spPr>
+              <a:xfrm>
+                <a:off x="1143685" y="1605123"/>
+                <a:ext cx="1572470" cy="461665"/>
+              </a:xfrm>
+              <a:prstGeom prst="rect">
+                <a:avLst/>
+              </a:prstGeom>
+              <a:blipFill>
+                <a:blip r:embed="rId5"/>
+                <a:stretch>
+                  <a:fillRect t="-10526" b="-28947"/>
+                </a:stretch>
+              </a:blipFill>
+            </p:spPr>
+            <p:txBody>
+              <a:bodyPr/>
+              <a:lstStyle/>
+              <a:p>
+                <a:r>
+                  <a:rPr lang="en-US">
+                    <a:noFill/>
+                  </a:rPr>
+                  <a:t> </a:t>
+                </a:r>
+              </a:p>
+            </p:txBody>
+          </p:sp>
+        </mc:Fallback>
+      </mc:AlternateContent>
     </p:spTree>
     <p:extLst>
       <p:ext uri="{BB962C8B-B14F-4D97-AF65-F5344CB8AC3E}">
@@ -12087,164 +12087,6 @@
       </p:sp>
       <p:cxnSp>
         <p:nvCxnSpPr>
-          <p:cNvPr id="6" name="Straight Arrow Connector 5">
-            <a:extLst>
-              <a:ext uri="{FF2B5EF4-FFF2-40B4-BE49-F238E27FC236}">
-                <a16:creationId xmlns:a16="http://schemas.microsoft.com/office/drawing/2014/main" id="{071F60B3-535A-7F54-3F6A-E54A037E59A9}"/>
-              </a:ext>
-            </a:extLst>
-          </p:cNvPr>
-          <p:cNvCxnSpPr>
-            <a:cxnSpLocks/>
-          </p:cNvCxnSpPr>
-          <p:nvPr/>
-        </p:nvCxnSpPr>
-        <p:spPr>
-          <a:xfrm>
-            <a:off x="2567292" y="1981391"/>
-            <a:ext cx="1226917" cy="0"/>
-          </a:xfrm>
-          <a:prstGeom prst="straightConnector1">
-            <a:avLst/>
-          </a:prstGeom>
-          <a:ln w="38100">
-            <a:solidFill>
-              <a:schemeClr val="tx1"/>
-            </a:solidFill>
-            <a:headEnd type="triangle"/>
-            <a:tailEnd type="triangle"/>
-          </a:ln>
-        </p:spPr>
-        <p:style>
-          <a:lnRef idx="1">
-            <a:schemeClr val="accent1"/>
-          </a:lnRef>
-          <a:fillRef idx="0">
-            <a:schemeClr val="accent1"/>
-          </a:fillRef>
-          <a:effectRef idx="0">
-            <a:schemeClr val="accent1"/>
-          </a:effectRef>
-          <a:fontRef idx="minor">
-            <a:schemeClr val="tx1"/>
-          </a:fontRef>
-        </p:style>
-      </p:cxnSp>
-      <mc:AlternateContent xmlns:mc="http://schemas.openxmlformats.org/markup-compatibility/2006" xmlns:a14="http://schemas.microsoft.com/office/drawing/2010/main">
-        <mc:Choice Requires="a14">
-          <p:sp>
-            <p:nvSpPr>
-              <p:cNvPr id="7" name="TextBox 6">
-                <a:extLst>
-                  <a:ext uri="{FF2B5EF4-FFF2-40B4-BE49-F238E27FC236}">
-                    <a16:creationId xmlns:a16="http://schemas.microsoft.com/office/drawing/2014/main" id="{30155302-AAC9-8A19-B0A3-5D14E05962EA}"/>
-                  </a:ext>
-                </a:extLst>
-              </p:cNvPr>
-              <p:cNvSpPr txBox="1"/>
-              <p:nvPr/>
-            </p:nvSpPr>
-            <p:spPr>
-              <a:xfrm>
-                <a:off x="2326390" y="1432135"/>
-                <a:ext cx="2079498" cy="461665"/>
-              </a:xfrm>
-              <a:prstGeom prst="rect">
-                <a:avLst/>
-              </a:prstGeom>
-              <a:noFill/>
-            </p:spPr>
-            <p:txBody>
-              <a:bodyPr wrap="square" rtlCol="0">
-                <a:spAutoFit/>
-              </a:bodyPr>
-              <a:lstStyle/>
-              <a:p>
-                <a:pPr algn="ctr"/>
-                <a:r>
-                  <a:rPr lang="en-PH" sz="2400" b="1" dirty="0">
-                    <a:latin typeface="Times New Roman" panose="02020603050405020304" pitchFamily="18" charset="0"/>
-                    <a:ea typeface="Malgun Gothic" panose="020B0503020000020004" pitchFamily="34" charset="-127"/>
-                    <a:cs typeface="Times New Roman" panose="02020603050405020304" pitchFamily="18" charset="0"/>
-                  </a:rPr>
-                  <a:t>2 </a:t>
-                </a:r>
-                <a14:m>
-                  <m:oMath xmlns:m="http://schemas.openxmlformats.org/officeDocument/2006/math">
-                    <m:r>
-                      <a:rPr lang="en-US" sz="2400" b="1" i="1">
-                        <a:latin typeface="Cambria Math" panose="02040503050406030204" pitchFamily="18" charset="0"/>
-                        <a:ea typeface="Malgun Gothic" panose="020B0503020000020004" pitchFamily="34" charset="-127"/>
-                        <a:cs typeface="Times New Roman" panose="02020603050405020304" pitchFamily="18" charset="0"/>
-                      </a:rPr>
-                      <m:t>𝝁</m:t>
-                    </m:r>
-                  </m:oMath>
-                </a14:m>
-                <a:r>
-                  <a:rPr lang="en-PH" sz="2400" b="1" dirty="0">
-                    <a:latin typeface="Times New Roman" panose="02020603050405020304" pitchFamily="18" charset="0"/>
-                    <a:ea typeface="Malgun Gothic" panose="020B0503020000020004" pitchFamily="34" charset="-127"/>
-                    <a:cs typeface="Times New Roman" panose="02020603050405020304" pitchFamily="18" charset="0"/>
-                  </a:rPr>
-                  <a:t>s/div.</a:t>
-                </a:r>
-                <a:endParaRPr lang="en-PH" sz="2400" b="1" baseline="-25000" dirty="0">
-                  <a:latin typeface="Times New Roman" panose="02020603050405020304" pitchFamily="18" charset="0"/>
-                  <a:ea typeface="Malgun Gothic" panose="020B0503020000020004" pitchFamily="34" charset="-127"/>
-                  <a:cs typeface="Times New Roman" panose="02020603050405020304" pitchFamily="18" charset="0"/>
-                </a:endParaRPr>
-              </a:p>
-            </p:txBody>
-          </p:sp>
-        </mc:Choice>
-        <mc:Fallback xmlns="">
-          <p:sp>
-            <p:nvSpPr>
-              <p:cNvPr id="7" name="TextBox 6">
-                <a:extLst>
-                  <a:ext uri="{FF2B5EF4-FFF2-40B4-BE49-F238E27FC236}">
-                    <a16:creationId xmlns:a16="http://schemas.microsoft.com/office/drawing/2014/main" id="{82CA20E8-0A21-646C-405A-245DA0401039}"/>
-                  </a:ext>
-                </a:extLst>
-              </p:cNvPr>
-              <p:cNvSpPr txBox="1">
-                <a:spLocks noRot="1" noChangeAspect="1" noMove="1" noResize="1" noEditPoints="1" noAdjustHandles="1" noChangeArrowheads="1" noChangeShapeType="1" noTextEdit="1"/>
-              </p:cNvSpPr>
-              <p:nvPr/>
-            </p:nvSpPr>
-            <p:spPr>
-              <a:xfrm>
-                <a:off x="2326390" y="1432135"/>
-                <a:ext cx="2079498" cy="461665"/>
-              </a:xfrm>
-              <a:prstGeom prst="rect">
-                <a:avLst/>
-              </a:prstGeom>
-              <a:blipFill>
-                <a:blip r:embed="rId3"/>
-                <a:stretch>
-                  <a:fillRect t="-10526" b="-28947"/>
-                </a:stretch>
-              </a:blipFill>
-            </p:spPr>
-            <p:txBody>
-              <a:bodyPr/>
-              <a:lstStyle/>
-              <a:p>
-                <a:r>
-                  <a:rPr lang="en-US">
-                    <a:noFill/>
-                  </a:rPr>
-                  <a:t> </a:t>
-                </a:r>
-              </a:p>
-            </p:txBody>
-          </p:sp>
-        </mc:Fallback>
-      </mc:AlternateContent>
-      <p:cxnSp>
-        <p:nvCxnSpPr>
           <p:cNvPr id="8" name="Straight Arrow Connector 7">
             <a:extLst>
               <a:ext uri="{FF2B5EF4-FFF2-40B4-BE49-F238E27FC236}">
@@ -12288,8 +12130,8 @@
           </a:fontRef>
         </p:style>
       </p:cxnSp>
-      <mc:AlternateContent xmlns:mc="http://schemas.openxmlformats.org/markup-compatibility/2006">
-        <mc:Choice xmlns:a14="http://schemas.microsoft.com/office/drawing/2010/main" Requires="a14">
+      <mc:AlternateContent xmlns:mc="http://schemas.openxmlformats.org/markup-compatibility/2006" xmlns:a14="http://schemas.microsoft.com/office/drawing/2010/main">
+        <mc:Choice Requires="a14">
           <p:sp>
             <p:nvSpPr>
               <p:cNvPr id="9" name="TextBox 8">
@@ -12383,7 +12225,7 @@
             </p:txBody>
           </p:sp>
         </mc:Choice>
-        <mc:Fallback>
+        <mc:Fallback xmlns="">
           <p:sp>
             <p:nvSpPr>
               <p:cNvPr id="9" name="TextBox 8">
@@ -13389,6 +13231,164 @@
           </a:p>
         </p:txBody>
       </p:sp>
+      <p:cxnSp>
+        <p:nvCxnSpPr>
+          <p:cNvPr id="2" name="Straight Arrow Connector 1">
+            <a:extLst>
+              <a:ext uri="{FF2B5EF4-FFF2-40B4-BE49-F238E27FC236}">
+                <a16:creationId xmlns:a16="http://schemas.microsoft.com/office/drawing/2014/main" id="{C25A5A82-BB23-6B20-8F3F-3581F1D48E37}"/>
+              </a:ext>
+            </a:extLst>
+          </p:cNvPr>
+          <p:cNvCxnSpPr>
+            <a:cxnSpLocks/>
+          </p:cNvCxnSpPr>
+          <p:nvPr/>
+        </p:nvCxnSpPr>
+        <p:spPr>
+          <a:xfrm>
+            <a:off x="1333872" y="1903024"/>
+            <a:ext cx="1267528" cy="0"/>
+          </a:xfrm>
+          <a:prstGeom prst="straightConnector1">
+            <a:avLst/>
+          </a:prstGeom>
+          <a:ln w="38100">
+            <a:solidFill>
+              <a:schemeClr val="tx1"/>
+            </a:solidFill>
+            <a:headEnd type="triangle"/>
+            <a:tailEnd type="triangle"/>
+          </a:ln>
+        </p:spPr>
+        <p:style>
+          <a:lnRef idx="1">
+            <a:schemeClr val="accent1"/>
+          </a:lnRef>
+          <a:fillRef idx="0">
+            <a:schemeClr val="accent1"/>
+          </a:fillRef>
+          <a:effectRef idx="0">
+            <a:schemeClr val="accent1"/>
+          </a:effectRef>
+          <a:fontRef idx="minor">
+            <a:schemeClr val="tx1"/>
+          </a:fontRef>
+        </p:style>
+      </p:cxnSp>
+      <mc:AlternateContent xmlns:mc="http://schemas.openxmlformats.org/markup-compatibility/2006">
+        <mc:Choice xmlns:a14="http://schemas.microsoft.com/office/drawing/2010/main" Requires="a14">
+          <p:sp>
+            <p:nvSpPr>
+              <p:cNvPr id="3" name="TextBox 2">
+                <a:extLst>
+                  <a:ext uri="{FF2B5EF4-FFF2-40B4-BE49-F238E27FC236}">
+                    <a16:creationId xmlns:a16="http://schemas.microsoft.com/office/drawing/2014/main" id="{99801CBC-2641-80C7-14AF-9AA3CA11C8AD}"/>
+                  </a:ext>
+                </a:extLst>
+              </p:cNvPr>
+              <p:cNvSpPr txBox="1"/>
+              <p:nvPr/>
+            </p:nvSpPr>
+            <p:spPr>
+              <a:xfrm>
+                <a:off x="1165275" y="1436201"/>
+                <a:ext cx="1572470" cy="461665"/>
+              </a:xfrm>
+              <a:prstGeom prst="rect">
+                <a:avLst/>
+              </a:prstGeom>
+              <a:noFill/>
+            </p:spPr>
+            <p:txBody>
+              <a:bodyPr wrap="square" rtlCol="0">
+                <a:spAutoFit/>
+              </a:bodyPr>
+              <a:lstStyle/>
+              <a:p>
+                <a:pPr algn="ctr"/>
+                <a:r>
+                  <a:rPr lang="en-PH" sz="2400" b="1" dirty="0">
+                    <a:latin typeface="Times New Roman" panose="02020603050405020304" pitchFamily="18" charset="0"/>
+                    <a:ea typeface="Malgun Gothic" panose="020B0503020000020004" pitchFamily="34" charset="-127"/>
+                    <a:cs typeface="Times New Roman" panose="02020603050405020304" pitchFamily="18" charset="0"/>
+                  </a:rPr>
+                  <a:t>2 </a:t>
+                </a:r>
+                <a14:m>
+                  <m:oMath xmlns:m="http://schemas.openxmlformats.org/officeDocument/2006/math">
+                    <m:r>
+                      <a:rPr lang="en-US" sz="2400" b="1" i="1" smtClean="0">
+                        <a:latin typeface="Cambria Math" panose="02040503050406030204" pitchFamily="18" charset="0"/>
+                        <a:ea typeface="Malgun Gothic" panose="020B0503020000020004" pitchFamily="34" charset="-127"/>
+                        <a:cs typeface="Times New Roman" panose="02020603050405020304" pitchFamily="18" charset="0"/>
+                      </a:rPr>
+                      <m:t>𝝁</m:t>
+                    </m:r>
+                  </m:oMath>
+                </a14:m>
+                <a:r>
+                  <a:rPr lang="en-PH" sz="2400" b="1" dirty="0">
+                    <a:latin typeface="Times New Roman" panose="02020603050405020304" pitchFamily="18" charset="0"/>
+                    <a:ea typeface="Malgun Gothic" panose="020B0503020000020004" pitchFamily="34" charset="-127"/>
+                    <a:cs typeface="Times New Roman" panose="02020603050405020304" pitchFamily="18" charset="0"/>
+                  </a:rPr>
+                  <a:t>s/div.</a:t>
+                </a:r>
+                <a:endParaRPr lang="en-PH" sz="2400" b="1" baseline="-25000" dirty="0">
+                  <a:latin typeface="Times New Roman" panose="02020603050405020304" pitchFamily="18" charset="0"/>
+                  <a:ea typeface="Malgun Gothic" panose="020B0503020000020004" pitchFamily="34" charset="-127"/>
+                  <a:cs typeface="Times New Roman" panose="02020603050405020304" pitchFamily="18" charset="0"/>
+                </a:endParaRPr>
+              </a:p>
+            </p:txBody>
+          </p:sp>
+        </mc:Choice>
+        <mc:Fallback>
+          <p:sp>
+            <p:nvSpPr>
+              <p:cNvPr id="3" name="TextBox 2">
+                <a:extLst>
+                  <a:ext uri="{FF2B5EF4-FFF2-40B4-BE49-F238E27FC236}">
+                    <a16:creationId xmlns:a16="http://schemas.microsoft.com/office/drawing/2014/main" id="{99801CBC-2641-80C7-14AF-9AA3CA11C8AD}"/>
+                  </a:ext>
+                </a:extLst>
+              </p:cNvPr>
+              <p:cNvSpPr txBox="1">
+                <a:spLocks noRot="1" noChangeAspect="1" noMove="1" noResize="1" noEditPoints="1" noAdjustHandles="1" noChangeArrowheads="1" noChangeShapeType="1" noTextEdit="1"/>
+              </p:cNvSpPr>
+              <p:nvPr/>
+            </p:nvSpPr>
+            <p:spPr>
+              <a:xfrm>
+                <a:off x="1165275" y="1436201"/>
+                <a:ext cx="1572470" cy="461665"/>
+              </a:xfrm>
+              <a:prstGeom prst="rect">
+                <a:avLst/>
+              </a:prstGeom>
+              <a:blipFill>
+                <a:blip r:embed="rId5"/>
+                <a:stretch>
+                  <a:fillRect t="-10667" b="-30667"/>
+                </a:stretch>
+              </a:blipFill>
+            </p:spPr>
+            <p:txBody>
+              <a:bodyPr/>
+              <a:lstStyle/>
+              <a:p>
+                <a:r>
+                  <a:rPr lang="en-US">
+                    <a:noFill/>
+                  </a:rPr>
+                  <a:t> </a:t>
+                </a:r>
+              </a:p>
+            </p:txBody>
+          </p:sp>
+        </mc:Fallback>
+      </mc:AlternateContent>
     </p:spTree>
     <p:extLst>
       <p:ext uri="{BB962C8B-B14F-4D97-AF65-F5344CB8AC3E}">
@@ -14763,170 +14763,6 @@
           </a:p>
         </p:txBody>
       </p:sp>
-      <p:cxnSp>
-        <p:nvCxnSpPr>
-          <p:cNvPr id="58" name="Straight Arrow Connector 57">
-            <a:extLst>
-              <a:ext uri="{FF2B5EF4-FFF2-40B4-BE49-F238E27FC236}">
-                <a16:creationId xmlns:a16="http://schemas.microsoft.com/office/drawing/2014/main" id="{D0F8E624-D116-650A-84BB-41E77FFF1FB5}"/>
-              </a:ext>
-            </a:extLst>
-          </p:cNvPr>
-          <p:cNvCxnSpPr/>
-          <p:nvPr/>
-        </p:nvCxnSpPr>
-        <p:spPr>
-          <a:xfrm>
-            <a:off x="893218" y="1981391"/>
-            <a:ext cx="1226917" cy="0"/>
-          </a:xfrm>
-          <a:prstGeom prst="straightConnector1">
-            <a:avLst/>
-          </a:prstGeom>
-          <a:ln w="38100">
-            <a:solidFill>
-              <a:schemeClr val="tx1"/>
-            </a:solidFill>
-            <a:headEnd type="triangle"/>
-            <a:tailEnd type="triangle"/>
-          </a:ln>
-        </p:spPr>
-        <p:style>
-          <a:lnRef idx="1">
-            <a:schemeClr val="accent1"/>
-          </a:lnRef>
-          <a:fillRef idx="0">
-            <a:schemeClr val="accent1"/>
-          </a:fillRef>
-          <a:effectRef idx="0">
-            <a:schemeClr val="accent1"/>
-          </a:effectRef>
-          <a:fontRef idx="minor">
-            <a:schemeClr val="tx1"/>
-          </a:fontRef>
-        </p:style>
-      </p:cxnSp>
-      <mc:AlternateContent xmlns:mc="http://schemas.openxmlformats.org/markup-compatibility/2006" xmlns:a14="http://schemas.microsoft.com/office/drawing/2010/main">
-        <mc:Choice Requires="a14">
-          <p:sp>
-            <p:nvSpPr>
-              <p:cNvPr id="59" name="TextBox 58">
-                <a:extLst>
-                  <a:ext uri="{FF2B5EF4-FFF2-40B4-BE49-F238E27FC236}">
-                    <a16:creationId xmlns:a16="http://schemas.microsoft.com/office/drawing/2014/main" id="{60417E38-E9AC-625A-BCCA-12EAA755F772}"/>
-                  </a:ext>
-                </a:extLst>
-              </p:cNvPr>
-              <p:cNvSpPr txBox="1"/>
-              <p:nvPr/>
-            </p:nvSpPr>
-            <p:spPr>
-              <a:xfrm>
-                <a:off x="466927" y="1434595"/>
-                <a:ext cx="2079498" cy="461665"/>
-              </a:xfrm>
-              <a:prstGeom prst="rect">
-                <a:avLst/>
-              </a:prstGeom>
-              <a:noFill/>
-            </p:spPr>
-            <p:txBody>
-              <a:bodyPr wrap="square" rtlCol="0">
-                <a:spAutoFit/>
-              </a:bodyPr>
-              <a:lstStyle/>
-              <a:p>
-                <a:pPr algn="ctr"/>
-                <a:r>
-                  <a:rPr lang="en-PH" sz="2400" b="1" dirty="0">
-                    <a:latin typeface="Times New Roman" panose="02020603050405020304" pitchFamily="18" charset="0"/>
-                    <a:ea typeface="Malgun Gothic" panose="020B0503020000020004" pitchFamily="34" charset="-127"/>
-                    <a:cs typeface="Times New Roman" panose="02020603050405020304" pitchFamily="18" charset="0"/>
-                  </a:rPr>
-                  <a:t>4</a:t>
-                </a:r>
-                <a14:m>
-                  <m:oMath xmlns:m="http://schemas.openxmlformats.org/officeDocument/2006/math">
-                    <m:r>
-                      <a:rPr lang="en-PH" sz="2400" b="1" i="0" smtClean="0">
-                        <a:latin typeface="Cambria Math" panose="02040503050406030204" pitchFamily="18" charset="0"/>
-                        <a:ea typeface="Malgun Gothic" panose="020B0503020000020004" pitchFamily="34" charset="-127"/>
-                        <a:cs typeface="Times New Roman" panose="02020603050405020304" pitchFamily="18" charset="0"/>
-                      </a:rPr>
-                      <m:t> </m:t>
-                    </m:r>
-                    <m:r>
-                      <a:rPr lang="en-US" sz="2400" b="1" i="1" smtClean="0">
-                        <a:latin typeface="Cambria Math" panose="02040503050406030204" pitchFamily="18" charset="0"/>
-                        <a:ea typeface="Malgun Gothic" panose="020B0503020000020004" pitchFamily="34" charset="-127"/>
-                        <a:cs typeface="Times New Roman" panose="02020603050405020304" pitchFamily="18" charset="0"/>
-                      </a:rPr>
-                      <m:t>𝝁</m:t>
-                    </m:r>
-                  </m:oMath>
-                </a14:m>
-                <a:r>
-                  <a:rPr lang="en-PH" sz="2400" b="1" dirty="0">
-                    <a:latin typeface="Times New Roman" panose="02020603050405020304" pitchFamily="18" charset="0"/>
-                    <a:ea typeface="Malgun Gothic" panose="020B0503020000020004" pitchFamily="34" charset="-127"/>
-                    <a:cs typeface="Times New Roman" panose="02020603050405020304" pitchFamily="18" charset="0"/>
-                  </a:rPr>
-                  <a:t>s/div.</a:t>
-                </a:r>
-                <a:endParaRPr lang="en-PH" sz="2400" b="1" baseline="-25000" dirty="0">
-                  <a:latin typeface="Times New Roman" panose="02020603050405020304" pitchFamily="18" charset="0"/>
-                  <a:ea typeface="Malgun Gothic" panose="020B0503020000020004" pitchFamily="34" charset="-127"/>
-                  <a:cs typeface="Times New Roman" panose="02020603050405020304" pitchFamily="18" charset="0"/>
-                </a:endParaRPr>
-              </a:p>
-            </p:txBody>
-          </p:sp>
-        </mc:Choice>
-        <mc:Fallback xmlns="">
-          <p:sp>
-            <p:nvSpPr>
-              <p:cNvPr id="59" name="TextBox 58">
-                <a:extLst>
-                  <a:ext uri="{FF2B5EF4-FFF2-40B4-BE49-F238E27FC236}">
-                    <a16:creationId xmlns:a16="http://schemas.microsoft.com/office/drawing/2014/main" id="{0A456669-7694-4076-786F-C5FA4C8B5D27}"/>
-                  </a:ext>
-                </a:extLst>
-              </p:cNvPr>
-              <p:cNvSpPr txBox="1">
-                <a:spLocks noRot="1" noChangeAspect="1" noMove="1" noResize="1" noEditPoints="1" noAdjustHandles="1" noChangeArrowheads="1" noChangeShapeType="1" noTextEdit="1"/>
-              </p:cNvSpPr>
-              <p:nvPr/>
-            </p:nvSpPr>
-            <p:spPr>
-              <a:xfrm>
-                <a:off x="466927" y="1434595"/>
-                <a:ext cx="2079498" cy="461665"/>
-              </a:xfrm>
-              <a:prstGeom prst="rect">
-                <a:avLst/>
-              </a:prstGeom>
-              <a:blipFill>
-                <a:blip r:embed="rId3"/>
-                <a:stretch>
-                  <a:fillRect t="-10526" b="-28947"/>
-                </a:stretch>
-              </a:blipFill>
-            </p:spPr>
-            <p:txBody>
-              <a:bodyPr/>
-              <a:lstStyle/>
-              <a:p>
-                <a:r>
-                  <a:rPr lang="en-US">
-                    <a:noFill/>
-                  </a:rPr>
-                  <a:t> </a:t>
-                </a:r>
-              </a:p>
-            </p:txBody>
-          </p:sp>
-        </mc:Fallback>
-      </mc:AlternateContent>
       <p:sp>
         <p:nvSpPr>
           <p:cNvPr id="62" name="TextBox 6">
@@ -15372,6 +15208,164 @@
           </a:p>
         </p:txBody>
       </p:sp>
+      <p:cxnSp>
+        <p:nvCxnSpPr>
+          <p:cNvPr id="2" name="Straight Arrow Connector 1">
+            <a:extLst>
+              <a:ext uri="{FF2B5EF4-FFF2-40B4-BE49-F238E27FC236}">
+                <a16:creationId xmlns:a16="http://schemas.microsoft.com/office/drawing/2014/main" id="{5145BE70-E7A3-B55B-5A6F-24CFDF61DEAF}"/>
+              </a:ext>
+            </a:extLst>
+          </p:cNvPr>
+          <p:cNvCxnSpPr>
+            <a:cxnSpLocks/>
+          </p:cNvCxnSpPr>
+          <p:nvPr/>
+        </p:nvCxnSpPr>
+        <p:spPr>
+          <a:xfrm>
+            <a:off x="851907" y="2071946"/>
+            <a:ext cx="1267528" cy="0"/>
+          </a:xfrm>
+          <a:prstGeom prst="straightConnector1">
+            <a:avLst/>
+          </a:prstGeom>
+          <a:ln w="38100">
+            <a:solidFill>
+              <a:schemeClr val="tx1"/>
+            </a:solidFill>
+            <a:headEnd type="triangle"/>
+            <a:tailEnd type="triangle"/>
+          </a:ln>
+        </p:spPr>
+        <p:style>
+          <a:lnRef idx="1">
+            <a:schemeClr val="accent1"/>
+          </a:lnRef>
+          <a:fillRef idx="0">
+            <a:schemeClr val="accent1"/>
+          </a:fillRef>
+          <a:effectRef idx="0">
+            <a:schemeClr val="accent1"/>
+          </a:effectRef>
+          <a:fontRef idx="minor">
+            <a:schemeClr val="tx1"/>
+          </a:fontRef>
+        </p:style>
+      </p:cxnSp>
+      <mc:AlternateContent xmlns:mc="http://schemas.openxmlformats.org/markup-compatibility/2006">
+        <mc:Choice xmlns:a14="http://schemas.microsoft.com/office/drawing/2010/main" Requires="a14">
+          <p:sp>
+            <p:nvSpPr>
+              <p:cNvPr id="4" name="TextBox 3">
+                <a:extLst>
+                  <a:ext uri="{FF2B5EF4-FFF2-40B4-BE49-F238E27FC236}">
+                    <a16:creationId xmlns:a16="http://schemas.microsoft.com/office/drawing/2014/main" id="{6393C90D-C584-EF78-3B26-F98AF337FCA4}"/>
+                  </a:ext>
+                </a:extLst>
+              </p:cNvPr>
+              <p:cNvSpPr txBox="1"/>
+              <p:nvPr/>
+            </p:nvSpPr>
+            <p:spPr>
+              <a:xfrm>
+                <a:off x="683310" y="1605123"/>
+                <a:ext cx="1572470" cy="461665"/>
+              </a:xfrm>
+              <a:prstGeom prst="rect">
+                <a:avLst/>
+              </a:prstGeom>
+              <a:noFill/>
+            </p:spPr>
+            <p:txBody>
+              <a:bodyPr wrap="square" rtlCol="0">
+                <a:spAutoFit/>
+              </a:bodyPr>
+              <a:lstStyle/>
+              <a:p>
+                <a:pPr algn="ctr"/>
+                <a:r>
+                  <a:rPr lang="en-PH" sz="2400" b="1" dirty="0">
+                    <a:latin typeface="Times New Roman" panose="02020603050405020304" pitchFamily="18" charset="0"/>
+                    <a:ea typeface="Malgun Gothic" panose="020B0503020000020004" pitchFamily="34" charset="-127"/>
+                    <a:cs typeface="Times New Roman" panose="02020603050405020304" pitchFamily="18" charset="0"/>
+                  </a:rPr>
+                  <a:t>4 </a:t>
+                </a:r>
+                <a14:m>
+                  <m:oMath xmlns:m="http://schemas.openxmlformats.org/officeDocument/2006/math">
+                    <m:r>
+                      <a:rPr lang="en-US" sz="2400" b="1" i="1" smtClean="0">
+                        <a:latin typeface="Cambria Math" panose="02040503050406030204" pitchFamily="18" charset="0"/>
+                        <a:ea typeface="Malgun Gothic" panose="020B0503020000020004" pitchFamily="34" charset="-127"/>
+                        <a:cs typeface="Times New Roman" panose="02020603050405020304" pitchFamily="18" charset="0"/>
+                      </a:rPr>
+                      <m:t>𝝁</m:t>
+                    </m:r>
+                  </m:oMath>
+                </a14:m>
+                <a:r>
+                  <a:rPr lang="en-PH" sz="2400" b="1" dirty="0">
+                    <a:latin typeface="Times New Roman" panose="02020603050405020304" pitchFamily="18" charset="0"/>
+                    <a:ea typeface="Malgun Gothic" panose="020B0503020000020004" pitchFamily="34" charset="-127"/>
+                    <a:cs typeface="Times New Roman" panose="02020603050405020304" pitchFamily="18" charset="0"/>
+                  </a:rPr>
+                  <a:t>s/div.</a:t>
+                </a:r>
+                <a:endParaRPr lang="en-PH" sz="2400" b="1" baseline="-25000" dirty="0">
+                  <a:latin typeface="Times New Roman" panose="02020603050405020304" pitchFamily="18" charset="0"/>
+                  <a:ea typeface="Malgun Gothic" panose="020B0503020000020004" pitchFamily="34" charset="-127"/>
+                  <a:cs typeface="Times New Roman" panose="02020603050405020304" pitchFamily="18" charset="0"/>
+                </a:endParaRPr>
+              </a:p>
+            </p:txBody>
+          </p:sp>
+        </mc:Choice>
+        <mc:Fallback>
+          <p:sp>
+            <p:nvSpPr>
+              <p:cNvPr id="4" name="TextBox 3">
+                <a:extLst>
+                  <a:ext uri="{FF2B5EF4-FFF2-40B4-BE49-F238E27FC236}">
+                    <a16:creationId xmlns:a16="http://schemas.microsoft.com/office/drawing/2014/main" id="{6393C90D-C584-EF78-3B26-F98AF337FCA4}"/>
+                  </a:ext>
+                </a:extLst>
+              </p:cNvPr>
+              <p:cNvSpPr txBox="1">
+                <a:spLocks noRot="1" noChangeAspect="1" noMove="1" noResize="1" noEditPoints="1" noAdjustHandles="1" noChangeArrowheads="1" noChangeShapeType="1" noTextEdit="1"/>
+              </p:cNvSpPr>
+              <p:nvPr/>
+            </p:nvSpPr>
+            <p:spPr>
+              <a:xfrm>
+                <a:off x="683310" y="1605123"/>
+                <a:ext cx="1572470" cy="461665"/>
+              </a:xfrm>
+              <a:prstGeom prst="rect">
+                <a:avLst/>
+              </a:prstGeom>
+              <a:blipFill>
+                <a:blip r:embed="rId3"/>
+                <a:stretch>
+                  <a:fillRect t="-10526" b="-28947"/>
+                </a:stretch>
+              </a:blipFill>
+            </p:spPr>
+            <p:txBody>
+              <a:bodyPr/>
+              <a:lstStyle/>
+              <a:p>
+                <a:r>
+                  <a:rPr lang="en-US">
+                    <a:noFill/>
+                  </a:rPr>
+                  <a:t> </a:t>
+                </a:r>
+              </a:p>
+            </p:txBody>
+          </p:sp>
+        </mc:Fallback>
+      </mc:AlternateContent>
     </p:spTree>
     <p:extLst>
       <p:ext uri="{BB962C8B-B14F-4D97-AF65-F5344CB8AC3E}">
